--- a/docs/brand/PubliAI-Brand-Book.pptx
+++ b/docs/brand/PubliAI-Brand-Book.pptx
@@ -11921,7 +11921,7 @@
                 <a:ea typeface="Geist" pitchFamily="34" charset="-122"/>
                 <a:cs typeface="Geist" pitchFamily="34" charset="-120"/>
               </a:rPr>
-              <a:t>Não vendemos “IA”. Vendemos controle: sua operação inteira de marketplace, do cadastro à publicação, em um só lugar.</a:t>
+              <a:t>Não vendemos “IA”. Vendemos controle: sua operação inteira de marketplace, da planilha ao anúncio publicado, em um só lugar.</a:t>
             </a:r>
             <a:endParaRPr lang="en-US" sz="1700" dirty="0"/>
           </a:p>
